--- a/docs/decks/DIY_Antenna_Options.pptx
+++ b/docs/decks/DIY_Antenna_Options.pptx
@@ -3309,7 +3309,7 @@
                   <a:srgbClr val="999999"/>
                 </a:solidFill>
               </a:rPr>
-              <a:t>code v1.4  ·  2026-07-12  ·  1/10</a:t>
+              <a:t>code v1.5  ·  2026-07-13  ·  1/10</a:t>
             </a:r>
           </a:p>
         </p:txBody>
@@ -3598,7 +3598,7 @@
                   <a:srgbClr val="999999"/>
                 </a:solidFill>
               </a:rPr>
-              <a:t>code v1.4  ·  2026-07-12  ·  10/10</a:t>
+              <a:t>code v1.5  ·  2026-07-13  ·  10/10</a:t>
             </a:r>
           </a:p>
         </p:txBody>
@@ -3932,7 +3932,7 @@
                   <a:srgbClr val="999999"/>
                 </a:solidFill>
               </a:rPr>
-              <a:t>code v1.4  ·  2026-07-12  ·  2/10</a:t>
+              <a:t>code v1.5  ·  2026-07-13  ·  2/10</a:t>
             </a:r>
           </a:p>
         </p:txBody>
@@ -4251,7 +4251,7 @@
                   <a:srgbClr val="999999"/>
                 </a:solidFill>
               </a:rPr>
-              <a:t>code v1.4  ·  2026-07-12  ·  3/10</a:t>
+              <a:t>code v1.5  ·  2026-07-13  ·  3/10</a:t>
             </a:r>
           </a:p>
         </p:txBody>
@@ -4570,7 +4570,7 @@
                   <a:srgbClr val="999999"/>
                 </a:solidFill>
               </a:rPr>
-              <a:t>code v1.4  ·  2026-07-12  ·  4/10</a:t>
+              <a:t>code v1.5  ·  2026-07-13  ·  4/10</a:t>
             </a:r>
           </a:p>
         </p:txBody>
@@ -5379,7 +5379,7 @@
                   <a:srgbClr val="999999"/>
                 </a:solidFill>
               </a:rPr>
-              <a:t>code v1.4  ·  2026-07-12  ·  5/10</a:t>
+              <a:t>code v1.5  ·  2026-07-13  ·  5/10</a:t>
             </a:r>
           </a:p>
         </p:txBody>
@@ -5683,7 +5683,7 @@
                   <a:srgbClr val="999999"/>
                 </a:solidFill>
               </a:rPr>
-              <a:t>code v1.4  ·  2026-07-12  ·  6/10</a:t>
+              <a:t>code v1.5  ·  2026-07-13  ·  6/10</a:t>
             </a:r>
           </a:p>
         </p:txBody>
@@ -6002,7 +6002,7 @@
                   <a:srgbClr val="999999"/>
                 </a:solidFill>
               </a:rPr>
-              <a:t>code v1.4  ·  2026-07-12  ·  7/10</a:t>
+              <a:t>code v1.5  ·  2026-07-13  ·  7/10</a:t>
             </a:r>
           </a:p>
         </p:txBody>
@@ -6321,7 +6321,7 @@
                   <a:srgbClr val="999999"/>
                 </a:solidFill>
               </a:rPr>
-              <a:t>code v1.4  ·  2026-07-12  ·  8/10</a:t>
+              <a:t>code v1.5  ·  2026-07-13  ·  8/10</a:t>
             </a:r>
           </a:p>
         </p:txBody>
@@ -6610,7 +6610,7 @@
                   <a:srgbClr val="999999"/>
                 </a:solidFill>
               </a:rPr>
-              <a:t>code v1.4  ·  2026-07-12  ·  9/10</a:t>
+              <a:t>code v1.5  ·  2026-07-13  ·  9/10</a:t>
             </a:r>
           </a:p>
         </p:txBody>
